--- a/Fase4/03_results/FaseC/Evaluación AgenteRL_F4C_Agente300–Plataformainclinada.pptx
+++ b/Fase4/03_results/FaseC/Evaluación AgenteRL_F4C_Agente300–Plataformainclinada.pptx
@@ -15231,7 +15231,7 @@
                   </a:schemeClr>
                 </a:solidFill>
               </a:rPr>
-              <a:t>Influencias de las perturbaciones en plataforma plana</a:t>
+              <a:t>Influencias de las perturbaciones en plataforma inclinada</a:t>
             </a:r>
           </a:p>
           <a:p>
